--- a/presentations/b09-sdwan-executive/B09_SDWAN_Executive_Narrated.pptx
+++ b/presentations/b09-sdwan-executive/B09_SDWAN_Executive_Narrated.pptx
@@ -179,7 +179,7 @@
     </p:spTree>
     <p:extLst>
       <p:ext uri="{BB962C8B-B14F-4D97-AF65-F5344CB8AC3E}">
-        <p14:creationId xmlns:p14="http://schemas.microsoft.com/office/powerpoint/2010/main" val="2220161520"/>
+        <p14:creationId xmlns:p14="http://schemas.microsoft.com/office/powerpoint/2010/main" val="46535267"/>
       </p:ext>
     </p:extLst>
   </p:cSld>
@@ -2289,7 +2289,7 @@
             <a:hlinkClick r:id="" action="ppaction://media"/>
             <a:extLst>
               <a:ext uri="{FF2B5EF4-FFF2-40B4-BE49-F238E27FC236}">
-                <a16:creationId xmlns:a16="http://schemas.microsoft.com/office/drawing/2014/main" id="{4758416A-75E1-B427-CD58-8D75B8F5B97B}"/>
+                <a16:creationId xmlns:a16="http://schemas.microsoft.com/office/drawing/2014/main" id="{D648227D-2F9F-9919-65B4-91D71F000F83}"/>
               </a:ext>
             </a:extLst>
           </p:cNvPr>
@@ -2305,7 +2305,7 @@
                     <p:ext uri="{3AFAAA56-56D3-431D-BCD4-E75A35582382}">
                       <p173:tracksInfo xmlns:p173="http://schemas.microsoft.com/office/powerpoint/2017/3/main" displayLoc="slide">
                         <p173:trackLst>
-                          <p173:track id="{97943BC0-DFA2-4620-82FA-D585E6E00AF7}" label="English (captions)" lang="en-US" r:embed="rId6"/>
+                          <p173:track id="{14CC96D8-5573-4AF6-84AA-D76AA5C626B7}" label="English (captions)" lang="en-US" r:embed="rId6"/>
                         </p173:trackLst>
                       </p173:tracksInfo>
                     </p:ext>
@@ -2323,7 +2323,7 @@
         </p:blipFill>
         <p:spPr>
           <a:xfrm>
-            <a:off x="127000" y="6350000"/>
+            <a:off x="12446000" y="127000"/>
             <a:ext cx="304800" cy="304800"/>
           </a:xfrm>
           <a:prstGeom prst="rect">
@@ -4839,7 +4839,7 @@
             <a:hlinkClick r:id="" action="ppaction://media"/>
             <a:extLst>
               <a:ext uri="{FF2B5EF4-FFF2-40B4-BE49-F238E27FC236}">
-                <a16:creationId xmlns:a16="http://schemas.microsoft.com/office/drawing/2014/main" id="{E3A256F1-D455-4C1F-C2D5-4503E9300A62}"/>
+                <a16:creationId xmlns:a16="http://schemas.microsoft.com/office/drawing/2014/main" id="{961757B6-E12C-C693-08DF-37469ED84FBB}"/>
               </a:ext>
             </a:extLst>
           </p:cNvPr>
@@ -4855,7 +4855,7 @@
                     <p:ext uri="{3AFAAA56-56D3-431D-BCD4-E75A35582382}">
                       <p173:tracksInfo xmlns:p173="http://schemas.microsoft.com/office/powerpoint/2017/3/main" displayLoc="slide">
                         <p173:trackLst>
-                          <p173:track id="{C15011AC-ABF0-467B-8F3D-1620707397F9}" label="English (captions)" lang="en-US" r:embed="rId6"/>
+                          <p173:track id="{F5FFF832-5ACD-4933-A30F-6CD9E960D6CD}" label="English (captions)" lang="en-US" r:embed="rId6"/>
                         </p173:trackLst>
                       </p173:tracksInfo>
                     </p:ext>
@@ -4873,7 +4873,7 @@
         </p:blipFill>
         <p:spPr>
           <a:xfrm>
-            <a:off x="127000" y="6350000"/>
+            <a:off x="12446000" y="127000"/>
             <a:ext cx="304800" cy="304800"/>
           </a:xfrm>
           <a:prstGeom prst="rect">
@@ -5705,7 +5705,7 @@
             <a:hlinkClick r:id="" action="ppaction://media"/>
             <a:extLst>
               <a:ext uri="{FF2B5EF4-FFF2-40B4-BE49-F238E27FC236}">
-                <a16:creationId xmlns:a16="http://schemas.microsoft.com/office/drawing/2014/main" id="{1EB3ED04-194F-061C-1E95-42AF8033D781}"/>
+                <a16:creationId xmlns:a16="http://schemas.microsoft.com/office/drawing/2014/main" id="{77C4806C-AFDC-59B1-EC19-9873CA24B52C}"/>
               </a:ext>
             </a:extLst>
           </p:cNvPr>
@@ -5721,7 +5721,7 @@
                     <p:ext uri="{3AFAAA56-56D3-431D-BCD4-E75A35582382}">
                       <p173:tracksInfo xmlns:p173="http://schemas.microsoft.com/office/powerpoint/2017/3/main" displayLoc="slide">
                         <p173:trackLst>
-                          <p173:track id="{A967E564-B67C-4C78-9737-6076BCB62FEC}" label="English (captions)" lang="en-US" r:embed="rId8"/>
+                          <p173:track id="{371E6D06-65F8-4EF3-BA3C-0BFBED331FEF}" label="English (captions)" lang="en-US" r:embed="rId8"/>
                         </p173:trackLst>
                       </p173:tracksInfo>
                     </p:ext>
@@ -5739,7 +5739,7 @@
         </p:blipFill>
         <p:spPr>
           <a:xfrm>
-            <a:off x="127000" y="6350000"/>
+            <a:off x="12446000" y="127000"/>
             <a:ext cx="304800" cy="304800"/>
           </a:xfrm>
           <a:prstGeom prst="rect">
@@ -7092,7 +7092,7 @@
             <a:hlinkClick r:id="" action="ppaction://media"/>
             <a:extLst>
               <a:ext uri="{FF2B5EF4-FFF2-40B4-BE49-F238E27FC236}">
-                <a16:creationId xmlns:a16="http://schemas.microsoft.com/office/drawing/2014/main" id="{DB2D231B-670E-F668-F83E-0DCB4AFB8726}"/>
+                <a16:creationId xmlns:a16="http://schemas.microsoft.com/office/drawing/2014/main" id="{A2A80227-4B88-74B9-3B95-745E2C663334}"/>
               </a:ext>
             </a:extLst>
           </p:cNvPr>
@@ -7108,7 +7108,7 @@
                     <p:ext uri="{3AFAAA56-56D3-431D-BCD4-E75A35582382}">
                       <p173:tracksInfo xmlns:p173="http://schemas.microsoft.com/office/powerpoint/2017/3/main" displayLoc="slide">
                         <p173:trackLst>
-                          <p173:track id="{A287B131-12F7-4709-AFE6-8413B41C561A}" label="English (captions)" lang="en-US" r:embed="rId7"/>
+                          <p173:track id="{F3C7C5EE-6948-4E11-9EEE-8963DF23A5ED}" label="English (captions)" lang="en-US" r:embed="rId7"/>
                         </p173:trackLst>
                       </p173:tracksInfo>
                     </p:ext>
@@ -7126,7 +7126,7 @@
         </p:blipFill>
         <p:spPr>
           <a:xfrm>
-            <a:off x="127000" y="6350000"/>
+            <a:off x="12446000" y="127000"/>
             <a:ext cx="304800" cy="304800"/>
           </a:xfrm>
           <a:prstGeom prst="rect">
@@ -8906,7 +8906,7 @@
             <a:hlinkClick r:id="" action="ppaction://media"/>
             <a:extLst>
               <a:ext uri="{FF2B5EF4-FFF2-40B4-BE49-F238E27FC236}">
-                <a16:creationId xmlns:a16="http://schemas.microsoft.com/office/drawing/2014/main" id="{5EF47EFB-A51E-F3D2-D921-7098B12BD090}"/>
+                <a16:creationId xmlns:a16="http://schemas.microsoft.com/office/drawing/2014/main" id="{D8199AAB-BF65-2492-9F32-797A39390FBC}"/>
               </a:ext>
             </a:extLst>
           </p:cNvPr>
@@ -8922,7 +8922,7 @@
                     <p:ext uri="{3AFAAA56-56D3-431D-BCD4-E75A35582382}">
                       <p173:tracksInfo xmlns:p173="http://schemas.microsoft.com/office/powerpoint/2017/3/main" displayLoc="slide">
                         <p173:trackLst>
-                          <p173:track id="{F5A2DB79-76E1-418D-B673-3BFCBC6F60E5}" label="English (captions)" lang="en-US" r:embed="rId7"/>
+                          <p173:track id="{04958337-75DD-43E0-9ED1-B3B9E9A71986}" label="English (captions)" lang="en-US" r:embed="rId7"/>
                         </p173:trackLst>
                       </p173:tracksInfo>
                     </p:ext>
@@ -8940,7 +8940,7 @@
         </p:blipFill>
         <p:spPr>
           <a:xfrm>
-            <a:off x="127000" y="6350000"/>
+            <a:off x="12446000" y="127000"/>
             <a:ext cx="304800" cy="304800"/>
           </a:xfrm>
           <a:prstGeom prst="rect">
@@ -9610,7 +9610,7 @@
             <a:hlinkClick r:id="" action="ppaction://media"/>
             <a:extLst>
               <a:ext uri="{FF2B5EF4-FFF2-40B4-BE49-F238E27FC236}">
-                <a16:creationId xmlns:a16="http://schemas.microsoft.com/office/drawing/2014/main" id="{BA0637BF-5AA9-4450-1D22-5CEDD21307D3}"/>
+                <a16:creationId xmlns:a16="http://schemas.microsoft.com/office/drawing/2014/main" id="{6CB7DC21-AC59-A3F0-EB79-B4C9B87A0DAA}"/>
               </a:ext>
             </a:extLst>
           </p:cNvPr>
@@ -9626,7 +9626,7 @@
                     <p:ext uri="{3AFAAA56-56D3-431D-BCD4-E75A35582382}">
                       <p173:tracksInfo xmlns:p173="http://schemas.microsoft.com/office/powerpoint/2017/3/main" displayLoc="slide">
                         <p173:trackLst>
-                          <p173:track id="{295A14FA-4EB0-4A66-AF94-B81E4682E0C1}" label="English (captions)" lang="en-US" r:embed="rId7"/>
+                          <p173:track id="{C229E5B5-65CA-44E8-9BC4-A6B95D15A80A}" label="English (captions)" lang="en-US" r:embed="rId7"/>
                         </p173:trackLst>
                       </p173:tracksInfo>
                     </p:ext>
@@ -9644,7 +9644,7 @@
         </p:blipFill>
         <p:spPr>
           <a:xfrm>
-            <a:off x="127000" y="6350000"/>
+            <a:off x="12446000" y="127000"/>
             <a:ext cx="304800" cy="304800"/>
           </a:xfrm>
           <a:prstGeom prst="rect">
@@ -11027,7 +11027,7 @@
             <a:hlinkClick r:id="" action="ppaction://media"/>
             <a:extLst>
               <a:ext uri="{FF2B5EF4-FFF2-40B4-BE49-F238E27FC236}">
-                <a16:creationId xmlns:a16="http://schemas.microsoft.com/office/drawing/2014/main" id="{AD9FF674-5788-3D94-09AC-7EE3117D7F19}"/>
+                <a16:creationId xmlns:a16="http://schemas.microsoft.com/office/drawing/2014/main" id="{8F8434D6-79E6-7954-09DF-8BEA42256124}"/>
               </a:ext>
             </a:extLst>
           </p:cNvPr>
@@ -11043,7 +11043,7 @@
                     <p:ext uri="{3AFAAA56-56D3-431D-BCD4-E75A35582382}">
                       <p173:tracksInfo xmlns:p173="http://schemas.microsoft.com/office/powerpoint/2017/3/main" displayLoc="slide">
                         <p173:trackLst>
-                          <p173:track id="{70AF52FF-36E9-443E-8D04-28115FF44342}" label="English (captions)" lang="en-US" r:embed="rId7"/>
+                          <p173:track id="{D986554E-69BA-4641-91A8-7D8A5DB7C66F}" label="English (captions)" lang="en-US" r:embed="rId7"/>
                         </p173:trackLst>
                       </p173:tracksInfo>
                     </p:ext>
@@ -11061,7 +11061,7 @@
         </p:blipFill>
         <p:spPr>
           <a:xfrm>
-            <a:off x="127000" y="6350000"/>
+            <a:off x="12446000" y="127000"/>
             <a:ext cx="304800" cy="304800"/>
           </a:xfrm>
           <a:prstGeom prst="rect">
@@ -13350,7 +13350,7 @@
             <a:hlinkClick r:id="" action="ppaction://media"/>
             <a:extLst>
               <a:ext uri="{FF2B5EF4-FFF2-40B4-BE49-F238E27FC236}">
-                <a16:creationId xmlns:a16="http://schemas.microsoft.com/office/drawing/2014/main" id="{7A457611-9628-130F-EFAB-24B5A1C8FF55}"/>
+                <a16:creationId xmlns:a16="http://schemas.microsoft.com/office/drawing/2014/main" id="{1F74FCCD-A6D2-E327-8EEA-FB0315E43AC2}"/>
               </a:ext>
             </a:extLst>
           </p:cNvPr>
@@ -13366,7 +13366,7 @@
                     <p:ext uri="{3AFAAA56-56D3-431D-BCD4-E75A35582382}">
                       <p173:tracksInfo xmlns:p173="http://schemas.microsoft.com/office/powerpoint/2017/3/main" displayLoc="slide">
                         <p173:trackLst>
-                          <p173:track id="{4391F0CF-10C9-46EC-8DD0-E6D0CFE741B3}" label="English (captions)" lang="en-US" r:embed="rId7"/>
+                          <p173:track id="{AF184549-76B5-47A2-8CE5-F8B568FE713A}" label="English (captions)" lang="en-US" r:embed="rId7"/>
                         </p173:trackLst>
                       </p173:tracksInfo>
                     </p:ext>
@@ -13384,7 +13384,7 @@
         </p:blipFill>
         <p:spPr>
           <a:xfrm>
-            <a:off x="127000" y="6350000"/>
+            <a:off x="12446000" y="127000"/>
             <a:ext cx="304800" cy="304800"/>
           </a:xfrm>
           <a:prstGeom prst="rect">
@@ -17508,7 +17508,7 @@
             <a:hlinkClick r:id="" action="ppaction://media"/>
             <a:extLst>
               <a:ext uri="{FF2B5EF4-FFF2-40B4-BE49-F238E27FC236}">
-                <a16:creationId xmlns:a16="http://schemas.microsoft.com/office/drawing/2014/main" id="{03F0A861-FA95-0B2C-EA46-5BF5618D6449}"/>
+                <a16:creationId xmlns:a16="http://schemas.microsoft.com/office/drawing/2014/main" id="{4E6B414E-D188-C884-488D-A828D90F7D9E}"/>
               </a:ext>
             </a:extLst>
           </p:cNvPr>
@@ -17524,7 +17524,7 @@
                     <p:ext uri="{3AFAAA56-56D3-431D-BCD4-E75A35582382}">
                       <p173:tracksInfo xmlns:p173="http://schemas.microsoft.com/office/powerpoint/2017/3/main" displayLoc="slide">
                         <p173:trackLst>
-                          <p173:track id="{2E3BBADA-8282-4A79-87B9-56E54FD37925}" label="English (captions)" lang="en-US" r:embed="rId7"/>
+                          <p173:track id="{08B6A88A-D3B9-4F6A-AA26-2AADA5C68BC3}" label="English (captions)" lang="en-US" r:embed="rId7"/>
                         </p173:trackLst>
                       </p173:tracksInfo>
                     </p:ext>
@@ -17542,7 +17542,7 @@
         </p:blipFill>
         <p:spPr>
           <a:xfrm>
-            <a:off x="127000" y="6350000"/>
+            <a:off x="12446000" y="127000"/>
             <a:ext cx="304800" cy="304800"/>
           </a:xfrm>
           <a:prstGeom prst="rect">
@@ -19096,7 +19096,7 @@
             <a:hlinkClick r:id="" action="ppaction://media"/>
             <a:extLst>
               <a:ext uri="{FF2B5EF4-FFF2-40B4-BE49-F238E27FC236}">
-                <a16:creationId xmlns:a16="http://schemas.microsoft.com/office/drawing/2014/main" id="{DE3F7BFE-8693-EDD1-150F-A7679AE82847}"/>
+                <a16:creationId xmlns:a16="http://schemas.microsoft.com/office/drawing/2014/main" id="{0A23919A-B927-9796-4233-16A7F752D135}"/>
               </a:ext>
             </a:extLst>
           </p:cNvPr>
@@ -19112,7 +19112,7 @@
                     <p:ext uri="{3AFAAA56-56D3-431D-BCD4-E75A35582382}">
                       <p173:tracksInfo xmlns:p173="http://schemas.microsoft.com/office/powerpoint/2017/3/main" displayLoc="slide">
                         <p173:trackLst>
-                          <p173:track id="{9DFEB1A1-8C56-4DD4-85B3-61F7E5DA373A}" label="English (captions)" lang="en-US" r:embed="rId6"/>
+                          <p173:track id="{40C7FF29-82AA-4C62-961F-31484BFAA7C3}" label="English (captions)" lang="en-US" r:embed="rId6"/>
                         </p173:trackLst>
                       </p173:tracksInfo>
                     </p:ext>
@@ -19130,7 +19130,7 @@
         </p:blipFill>
         <p:spPr>
           <a:xfrm>
-            <a:off x="127000" y="6350000"/>
+            <a:off x="12446000" y="127000"/>
             <a:ext cx="304800" cy="304800"/>
           </a:xfrm>
           <a:prstGeom prst="rect">
@@ -20400,7 +20400,7 @@
             <a:hlinkClick r:id="" action="ppaction://media"/>
             <a:extLst>
               <a:ext uri="{FF2B5EF4-FFF2-40B4-BE49-F238E27FC236}">
-                <a16:creationId xmlns:a16="http://schemas.microsoft.com/office/drawing/2014/main" id="{3F8DBEFA-FCED-3460-1BD6-A735360EE4A8}"/>
+                <a16:creationId xmlns:a16="http://schemas.microsoft.com/office/drawing/2014/main" id="{67006750-4802-4064-1303-1A5FA26136C0}"/>
               </a:ext>
             </a:extLst>
           </p:cNvPr>
@@ -20416,7 +20416,7 @@
                     <p:ext uri="{3AFAAA56-56D3-431D-BCD4-E75A35582382}">
                       <p173:tracksInfo xmlns:p173="http://schemas.microsoft.com/office/powerpoint/2017/3/main" displayLoc="slide">
                         <p173:trackLst>
-                          <p173:track id="{2C9B1588-7B5B-4E77-9694-FFBF3C6C4B1E}" label="English (captions)" lang="en-US" r:embed="rId7"/>
+                          <p173:track id="{071BE8D7-EB5D-4E82-9A1A-C01C9EA471AF}" label="English (captions)" lang="en-US" r:embed="rId7"/>
                         </p173:trackLst>
                       </p173:tracksInfo>
                     </p:ext>
@@ -20434,7 +20434,7 @@
         </p:blipFill>
         <p:spPr>
           <a:xfrm>
-            <a:off x="127000" y="6350000"/>
+            <a:off x="12446000" y="127000"/>
             <a:ext cx="304800" cy="304800"/>
           </a:xfrm>
           <a:prstGeom prst="rect">
@@ -21710,7 +21710,7 @@
             <a:hlinkClick r:id="" action="ppaction://media"/>
             <a:extLst>
               <a:ext uri="{FF2B5EF4-FFF2-40B4-BE49-F238E27FC236}">
-                <a16:creationId xmlns:a16="http://schemas.microsoft.com/office/drawing/2014/main" id="{80104857-1BFA-1849-768F-A226C164407B}"/>
+                <a16:creationId xmlns:a16="http://schemas.microsoft.com/office/drawing/2014/main" id="{FEC4754A-B13F-50E0-DF28-DAF1FF8D4C58}"/>
               </a:ext>
             </a:extLst>
           </p:cNvPr>
@@ -21726,7 +21726,7 @@
                     <p:ext uri="{3AFAAA56-56D3-431D-BCD4-E75A35582382}">
                       <p173:tracksInfo xmlns:p173="http://schemas.microsoft.com/office/powerpoint/2017/3/main" displayLoc="slide">
                         <p173:trackLst>
-                          <p173:track id="{E14EAE91-1EFD-4251-AAB9-DE537F70DB1D}" label="English (captions)" lang="en-US" r:embed="rId7"/>
+                          <p173:track id="{F2223D9C-1D45-4293-AABE-7BC6B0799811}" label="English (captions)" lang="en-US" r:embed="rId7"/>
                         </p173:trackLst>
                       </p173:tracksInfo>
                     </p:ext>
@@ -21744,7 +21744,7 @@
         </p:blipFill>
         <p:spPr>
           <a:xfrm>
-            <a:off x="127000" y="6350000"/>
+            <a:off x="12446000" y="127000"/>
             <a:ext cx="304800" cy="304800"/>
           </a:xfrm>
           <a:prstGeom prst="rect">
